--- a/eric-talk/talk_10min.pptx
+++ b/eric-talk/talk_10min.pptx
@@ -17,6 +17,8 @@
     <p:sldId id="259" r:id="rId14"/>
     <p:sldId id="260" r:id="rId15"/>
     <p:sldId id="261" r:id="rId16"/>
+    <p:sldId id="262" r:id="rId17"/>
+    <p:sldId id="263" r:id="rId18"/>
   </p:sldIdLst>
   <p:sldSz cx="12192000" cy="6858000"/>
   <p:notesSz cx="6858000" cy="9144000"/>
@@ -10085,8 +10087,8 @@
           <a:lstStyle/>
           <a:p>
             <a:r>
-              <a:rPr sz="2800" b="1"/>
-              <a:t>Can LLMs Write Correct TLA+ Specifications?</a:t>
+              <a:rPr sz="3000" b="1"/>
+              <a:t>Teaching AI to Prove Software Is Bug-Free</a:t>
             </a:r>
           </a:p>
         </p:txBody>
@@ -10107,8 +10109,8 @@
           <a:lstStyle/>
           <a:p>
             <a:r>
-              <a:rPr sz="1400"/>
-              <a:t>Evaluating Natural-Language-to-TLA+ Generation</a:t>
+              <a:rPr sz="1500"/>
+              <a:t>The hardest lesson:  the AI will cheat unless you grade it honestly.</a:t>
             </a:r>
           </a:p>
         </p:txBody>
@@ -10129,8 +10131,8 @@
           <a:lstStyle/>
           <a:p>
             <a:r>
-              <a:rPr sz="900"/>
-              <a:t>AI4FM Research Group  |  Department of Computer Science  |  ai4fm.cs.luc.edu</a:t>
+              <a:rPr sz="1000"/>
+              <a:t>Eric Spencer  |  AI for Formal Methods Lab  |  ai4fm.cs.luc.edu</a:t>
             </a:r>
           </a:p>
         </p:txBody>
@@ -10192,91 +10194,63 @@
           <a:p>
             <a:pPr>
               <a:spcAft>
-                <a:spcPts val="400"/>
+                <a:spcPts val="800"/>
               </a:spcAft>
             </a:pPr>
             <a:r>
-              <a:rPr sz="1200" b="1"/>
-              <a:t>Formal specification language: </a:t>
-            </a:r>
-            <a:r>
-              <a:rPr sz="1200"/>
-              <a:t>describes system behavior precisely enough for a computer to verify</a:t>
+              <a:rPr sz="1500"/>
+              <a:t>Amazon Web Services, 2017:  one typo in a maintenance command took a large piece of the internet offline for four hours.</a:t>
             </a:r>
           </a:p>
           <a:p>
             <a:pPr>
               <a:spcAft>
-                <a:spcPts val="400"/>
+                <a:spcPts val="800"/>
               </a:spcAft>
             </a:pPr>
             <a:r>
-              <a:rPr sz="1200" b="1"/>
-              <a:t>State: </a:t>
-            </a:r>
-            <a:r>
-              <a:rPr sz="1200"/>
-              <a:t>a snapshot of the system at one moment (e.g., "the door is locked")</a:t>
+              <a:rPr sz="1500"/>
+              <a:t>Knight Capital, 2012:  one trading bug lost the company 440 million dollars in 45 minutes.</a:t>
             </a:r>
           </a:p>
           <a:p>
             <a:pPr>
               <a:spcAft>
-                <a:spcPts val="400"/>
+                <a:spcPts val="800"/>
               </a:spcAft>
             </a:pPr>
             <a:r>
-              <a:rPr sz="1200" b="1"/>
-              <a:t>Init / Next: </a:t>
-            </a:r>
-            <a:r>
-              <a:rPr sz="1200"/>
-              <a:t>the starting state and the rules for moving to the next state</a:t>
+              <a:rPr sz="1500"/>
+              <a:t>Boeing 737 MAX:  flight control software mistakes contributed to two crashes and 346 deaths.</a:t>
             </a:r>
           </a:p>
           <a:p>
             <a:pPr>
               <a:spcAft>
-                <a:spcPts val="400"/>
+                <a:spcPts val="800"/>
               </a:spcAft>
             </a:pPr>
             <a:r>
-              <a:rPr sz="1200" b="1"/>
-              <a:t>Invariant: </a:t>
-            </a:r>
-            <a:r>
-              <a:rPr sz="1200"/>
-              <a:t>a safety rule that must always hold (e.g., "two trains never occupy the same track")</a:t>
+              <a:rPr sz="1500"/>
+              <a:t>Your bank, your hospital, your car, your phone — all run software that nobody can fully test by hand.</a:t>
             </a:r>
           </a:p>
           <a:p>
             <a:pPr>
               <a:spcAft>
-                <a:spcPts val="400"/>
+                <a:spcPts val="800"/>
               </a:spcAft>
             </a:pPr>
-            <a:r>
-              <a:rPr sz="1200" b="1"/>
-              <a:t>SANY: </a:t>
-            </a:r>
-            <a:r>
-              <a:rPr sz="1200"/>
-              <a:t>syntax checker -- "Is this valid TLA+?"</a:t>
-            </a:r>
           </a:p>
           <a:p>
             <a:pPr>
               <a:spcAft>
-                <a:spcPts val="400"/>
+                <a:spcPts val="800"/>
               </a:spcAft>
             </a:pPr>
             <a:r>
-              <a:rPr sz="1200" b="1"/>
-              <a:t>TLC: </a:t>
-            </a:r>
-            <a:r>
-              <a:rPr sz="1200"/>
-              <a:t>model checker -- "Does this spec actually satisfy its safety rules?"</a:t>
+              <a:rPr sz="1500"/>
+              <a:t>The question of this talk:  can we prove software correct before we ship it, and can AI help ordinary engineers do that proof?</a:t>
             </a:r>
           </a:p>
         </p:txBody>
@@ -10288,7 +10262,7 @@
             <a:spLocks noGrp="1"/>
           </p:cNvSpPr>
           <p:nvPr>
-            <p:ph type="body" idx="15" sz="quarter"/>
+            <p:ph type="body" idx="12" sz="quarter"/>
           </p:nvPr>
         </p:nvSpPr>
         <p:spPr/>
@@ -10296,74 +10270,9 @@
           <a:bodyPr/>
           <a:lstStyle/>
           <a:p>
-            <a:pPr>
-              <a:spcAft>
-                <a:spcPts val="400"/>
-              </a:spcAft>
-            </a:pPr>
-            <a:r>
-              <a:rPr sz="1200" b="1"/>
-              <a:t>Amazon: </a:t>
-            </a:r>
-            <a:r>
-              <a:rPr sz="1200"/>
-              <a:t>used TLA+ to find critical bugs in DynamoDB and S3 that years of testing missed</a:t>
-            </a:r>
-          </a:p>
-          <a:p>
-            <a:pPr>
-              <a:spcAft>
-                <a:spcPts val="400"/>
-              </a:spcAft>
-            </a:pPr>
-            <a:r>
-              <a:rPr sz="1200" b="1"/>
-              <a:t>Microsoft Azure: </a:t>
-            </a:r>
-            <a:r>
-              <a:rPr sz="1200"/>
-              <a:t>verifies distributed protocols before deployment</a:t>
-            </a:r>
-          </a:p>
-          <a:p>
-            <a:pPr>
-              <a:spcAft>
-                <a:spcPts val="400"/>
-              </a:spcAft>
-            </a:pPr>
-            <a:r>
-              <a:rPr sz="1200" b="1"/>
-              <a:t>The barrier: </a:t>
-            </a:r>
-            <a:r>
-              <a:rPr sz="1200"/>
-              <a:t>writing TLA+ requires rare, specialized expertise -- most engineers cannot use it</a:t>
-            </a:r>
-          </a:p>
-          <a:p>
-            <a:pPr>
-              <a:spcAft>
-                <a:spcPts val="400"/>
-              </a:spcAft>
-            </a:pPr>
-            <a:r>
-              <a:rPr sz="1200" b="1"/>
-              <a:t>The opportunity: </a:t>
-            </a:r>
-            <a:r>
-              <a:rPr sz="1200"/>
-              <a:t>if AI could translate English to TLA+, formal verification becomes accessible to every engineer</a:t>
-            </a:r>
-          </a:p>
-          <a:p>
-            <a:pPr>
-              <a:spcAft>
-                <a:spcPts val="400"/>
-              </a:spcAft>
-            </a:pPr>
-            <a:r>
-              <a:rPr sz="1200"/>
-              <a:t>That is the question driving this research.</a:t>
+            <a:r>
+              <a:rPr sz="1400"/>
+              <a:t>A few of the ones we know about:</a:t>
             </a:r>
           </a:p>
         </p:txBody>
@@ -10371,6 +10280,28 @@
       <p:sp>
         <p:nvSpPr>
           <p:cNvPr id="4" name="Text Placeholder 3"/>
+          <p:cNvSpPr>
+            <a:spLocks noGrp="1"/>
+          </p:cNvSpPr>
+          <p:nvPr>
+            <p:ph type="body" idx="11" sz="quarter"/>
+          </p:nvPr>
+        </p:nvSpPr>
+        <p:spPr/>
+        <p:txBody>
+          <a:bodyPr/>
+          <a:lstStyle/>
+          <a:p>
+            <a:r>
+              <a:rPr sz="2800" b="1"/>
+              <a:t>Software Runs the World. Software Has Bugs.</a:t>
+            </a:r>
+          </a:p>
+        </p:txBody>
+      </p:sp>
+      <p:sp>
+        <p:nvSpPr>
+          <p:cNvPr id="5" name="Text Placeholder 4"/>
           <p:cNvSpPr>
             <a:spLocks noGrp="1"/>
           </p:cNvSpPr>
@@ -10383,72 +10314,6 @@
           <a:bodyPr/>
           <a:lstStyle/>
           <a:p/>
-        </p:txBody>
-      </p:sp>
-      <p:sp>
-        <p:nvSpPr>
-          <p:cNvPr id="5" name="Text Placeholder 4"/>
-          <p:cNvSpPr>
-            <a:spLocks noGrp="1"/>
-          </p:cNvSpPr>
-          <p:nvPr>
-            <p:ph type="body" idx="18" sz="quarter"/>
-          </p:nvPr>
-        </p:nvSpPr>
-        <p:spPr/>
-        <p:txBody>
-          <a:bodyPr/>
-          <a:lstStyle/>
-          <a:p>
-            <a:r>
-              <a:rPr sz="1400" b="1"/>
-              <a:t>The Language</a:t>
-            </a:r>
-          </a:p>
-        </p:txBody>
-      </p:sp>
-      <p:sp>
-        <p:nvSpPr>
-          <p:cNvPr id="6" name="Text Placeholder 5"/>
-          <p:cNvSpPr>
-            <a:spLocks noGrp="1"/>
-          </p:cNvSpPr>
-          <p:nvPr>
-            <p:ph type="body" idx="11" sz="quarter"/>
-          </p:nvPr>
-        </p:nvSpPr>
-        <p:spPr/>
-        <p:txBody>
-          <a:bodyPr/>
-          <a:lstStyle/>
-          <a:p>
-            <a:r>
-              <a:rPr sz="2800" b="1"/>
-              <a:t>What Is TLA+?</a:t>
-            </a:r>
-          </a:p>
-        </p:txBody>
-      </p:sp>
-      <p:sp>
-        <p:nvSpPr>
-          <p:cNvPr id="7" name="Text Placeholder 6"/>
-          <p:cNvSpPr>
-            <a:spLocks noGrp="1"/>
-          </p:cNvSpPr>
-          <p:nvPr>
-            <p:ph type="body" idx="19" sz="quarter"/>
-          </p:nvPr>
-        </p:nvSpPr>
-        <p:spPr/>
-        <p:txBody>
-          <a:bodyPr/>
-          <a:lstStyle/>
-          <a:p>
-            <a:r>
-              <a:rPr sz="1400" b="1"/>
-              <a:t>Why It Matters</a:t>
-            </a:r>
-          </a:p>
         </p:txBody>
       </p:sp>
     </p:spTree>
@@ -10486,79 +10351,63 @@
           <a:p>
             <a:pPr>
               <a:spcAft>
-                <a:spcPts val="400"/>
+                <a:spcPts val="800"/>
               </a:spcAft>
             </a:pPr>
             <a:r>
-              <a:rPr sz="1100" b="1"/>
-              <a:t>Examples: </a:t>
-            </a:r>
-            <a:r>
-              <a:rPr sz="1100"/>
-              <a:t>LLaMA, Mistral, Gemma</a:t>
+              <a:rPr sz="1500"/>
+              <a:t>You write the rules of your system in a language a computer can read.  The computer then checks every possible behavior for a rule violation.</a:t>
             </a:r>
           </a:p>
           <a:p>
             <a:pPr>
               <a:spcAft>
-                <a:spcPts val="400"/>
+                <a:spcPts val="800"/>
               </a:spcAft>
             </a:pPr>
             <a:r>
-              <a:rPr sz="1100"/>
-              <a:t>Trained on large amounts of internet text and code</a:t>
+              <a:rPr sz="1500"/>
+              <a:t>Think of it as writing the rules of a board game and asking a program to play every possible game to find a losing move.</a:t>
             </a:r>
           </a:p>
           <a:p>
             <a:pPr>
               <a:spcAft>
-                <a:spcPts val="400"/>
+                <a:spcPts val="800"/>
               </a:spcAft>
             </a:pPr>
             <a:r>
-              <a:rPr sz="1100"/>
-              <a:t>Good at pattern matching and completing familiar-looking code</a:t>
+              <a:rPr sz="1500"/>
+              <a:t>Already used at Amazon (DynamoDB, S3), Microsoft Azure, and Intel.  It catches bugs that years of testing missed.</a:t>
             </a:r>
           </a:p>
           <a:p>
             <a:pPr>
               <a:spcAft>
-                <a:spcPts val="400"/>
+                <a:spcPts val="800"/>
               </a:spcAft>
             </a:pPr>
             <a:r>
-              <a:rPr sz="1100" b="1"/>
-              <a:t>Limitation: </a:t>
-            </a:r>
-            <a:r>
-              <a:rPr sz="1100"/>
-              <a:t>TLA+ looks nothing like Python or Java -- these models frequently produce broken output</a:t>
+              <a:rPr sz="1500"/>
+              <a:t>The catch:  writing TLA+ requires rare expertise.  Most engineers have never seen it.  The people who need the safety cannot write the proof.</a:t>
             </a:r>
           </a:p>
           <a:p>
             <a:pPr>
               <a:spcAft>
-                <a:spcPts val="400"/>
+                <a:spcPts val="800"/>
               </a:spcAft>
             </a:pPr>
-            <a:r>
-              <a:rPr sz="1100"/>
-              <a:t/>
-            </a:r>
           </a:p>
           <a:p>
             <a:pPr>
               <a:spcAft>
-                <a:spcPts val="400"/>
+                <a:spcPts val="800"/>
               </a:spcAft>
             </a:pPr>
             <a:r>
-              <a:rPr sz="1100" b="1"/>
-              <a:t>Analogy: </a:t>
-            </a:r>
-            <a:r>
-              <a:rPr sz="1100"/>
-              <a:t>A native English speaker trying to write Mandarin by guessing characters</a:t>
+              <a:rPr sz="1500"/>
+              <a:t>That is the gap AI should be able to close.</a:t>
             </a:r>
           </a:p>
         </p:txBody>
@@ -10570,7 +10419,7 @@
             <a:spLocks noGrp="1"/>
           </p:cNvSpPr>
           <p:nvPr>
-            <p:ph type="body" idx="18" sz="quarter"/>
+            <p:ph type="body" idx="12" sz="quarter"/>
           </p:nvPr>
         </p:nvSpPr>
         <p:spPr/>
@@ -10578,81 +10427,9 @@
           <a:bodyPr/>
           <a:lstStyle/>
           <a:p>
-            <a:pPr>
-              <a:spcAft>
-                <a:spcPts val="400"/>
-              </a:spcAft>
-            </a:pPr>
-            <a:r>
-              <a:rPr sz="1100" b="1"/>
-              <a:t>Examples: </a:t>
-            </a:r>
-            <a:r>
-              <a:rPr sz="1100"/>
-              <a:t>Qwen-Coder, CodeLLaMA</a:t>
-            </a:r>
-          </a:p>
-          <a:p>
-            <a:pPr>
-              <a:spcAft>
-                <a:spcPts val="400"/>
-              </a:spcAft>
-            </a:pPr>
-            <a:r>
-              <a:rPr sz="1100"/>
-              <a:t>Specifically trained on programming languages (Python, JS, etc.)</a:t>
-            </a:r>
-          </a:p>
-          <a:p>
-            <a:pPr>
-              <a:spcAft>
-                <a:spcPts val="400"/>
-              </a:spcAft>
-            </a:pPr>
-            <a:r>
-              <a:rPr sz="1100"/>
-              <a:t>Should be good at code generation, right?</a:t>
-            </a:r>
-          </a:p>
-          <a:p>
-            <a:pPr>
-              <a:spcAft>
-                <a:spcPts val="400"/>
-              </a:spcAft>
-            </a:pPr>
-            <a:r>
-              <a:rPr sz="1100" b="1"/>
-              <a:t>Surprise: </a:t>
-            </a:r>
-            <a:r>
-              <a:rPr sz="1100"/>
-              <a:t>Actually performed WORST on TLA+ -- negative transfer from mainstream code</a:t>
-            </a:r>
-          </a:p>
-          <a:p>
-            <a:pPr>
-              <a:spcAft>
-                <a:spcPts val="400"/>
-              </a:spcAft>
-            </a:pPr>
-            <a:r>
-              <a:rPr sz="1100"/>
-              <a:t/>
-            </a:r>
-          </a:p>
-          <a:p>
-            <a:pPr>
-              <a:spcAft>
-                <a:spcPts val="400"/>
-              </a:spcAft>
-            </a:pPr>
-            <a:r>
-              <a:rPr sz="1100" b="1"/>
-              <a:t>Analogy: </a:t>
-            </a:r>
-            <a:r>
-              <a:rPr sz="1100"/>
-              <a:t>A French chef trying to make sushi -- expertise in one domain can hurt in another</a:t>
+            <a:r>
+              <a:rPr sz="1400"/>
+              <a:t>A mathematical language called TLA+, invented by Leslie Lamport.</a:t>
             </a:r>
           </a:p>
         </p:txBody>
@@ -10664,7 +10441,7 @@
             <a:spLocks noGrp="1"/>
           </p:cNvSpPr>
           <p:nvPr>
-            <p:ph type="body" idx="20" sz="quarter"/>
+            <p:ph type="body" idx="11" sz="quarter"/>
           </p:nvPr>
         </p:nvSpPr>
         <p:spPr/>
@@ -10672,81 +10449,9 @@
           <a:bodyPr/>
           <a:lstStyle/>
           <a:p>
-            <a:pPr>
-              <a:spcAft>
-                <a:spcPts val="400"/>
-              </a:spcAft>
-            </a:pPr>
-            <a:r>
-              <a:rPr sz="1100" b="1"/>
-              <a:t>Examples: </a:t>
-            </a:r>
-            <a:r>
-              <a:rPr sz="1100"/>
-              <a:t>DeepSeek R1, QwQ</a:t>
-            </a:r>
-          </a:p>
-          <a:p>
-            <a:pPr>
-              <a:spcAft>
-                <a:spcPts val="400"/>
-              </a:spcAft>
-            </a:pPr>
-            <a:r>
-              <a:rPr sz="1100"/>
-              <a:t>Designed to "think step-by-step" before answering</a:t>
-            </a:r>
-          </a:p>
-          <a:p>
-            <a:pPr>
-              <a:spcAft>
-                <a:spcPts val="400"/>
-              </a:spcAft>
-            </a:pPr>
-            <a:r>
-              <a:rPr sz="1100"/>
-              <a:t>Better at logical structure and multi-step problems</a:t>
-            </a:r>
-          </a:p>
-          <a:p>
-            <a:pPr>
-              <a:spcAft>
-                <a:spcPts val="400"/>
-              </a:spcAft>
-            </a:pPr>
-            <a:r>
-              <a:rPr sz="1100" b="1"/>
-              <a:t>Result: </a:t>
-            </a:r>
-            <a:r>
-              <a:rPr sz="1100"/>
-              <a:t>Best performers overall -- how a model reasons matters more than its size</a:t>
-            </a:r>
-          </a:p>
-          <a:p>
-            <a:pPr>
-              <a:spcAft>
-                <a:spcPts val="400"/>
-              </a:spcAft>
-            </a:pPr>
-            <a:r>
-              <a:rPr sz="1100"/>
-              <a:t/>
-            </a:r>
-          </a:p>
-          <a:p>
-            <a:pPr>
-              <a:spcAft>
-                <a:spcPts val="400"/>
-              </a:spcAft>
-            </a:pPr>
-            <a:r>
-              <a:rPr sz="1100" b="1"/>
-              <a:t>Analogy: </a:t>
-            </a:r>
-            <a:r>
-              <a:rPr sz="1100"/>
-              <a:t>Someone who reads the grammar book before writing a sentence</a:t>
+            <a:r>
+              <a:rPr sz="2800" b="1"/>
+              <a:t>The Fix From the 1990s</a:t>
             </a:r>
           </a:p>
         </p:txBody>
@@ -10758,7 +10463,7 @@
             <a:spLocks noGrp="1"/>
           </p:cNvSpPr>
           <p:nvPr>
-            <p:ph type="body" idx="16" sz="quarter"/>
+            <p:ph type="body" idx="17" sz="quarter"/>
           </p:nvPr>
         </p:nvSpPr>
         <p:spPr/>
@@ -10766,94 +10471,6 @@
           <a:bodyPr/>
           <a:lstStyle/>
           <a:p/>
-        </p:txBody>
-      </p:sp>
-      <p:sp>
-        <p:nvSpPr>
-          <p:cNvPr id="6" name="Text Placeholder 5"/>
-          <p:cNvSpPr>
-            <a:spLocks noGrp="1"/>
-          </p:cNvSpPr>
-          <p:nvPr>
-            <p:ph type="body" idx="22" sz="quarter"/>
-          </p:nvPr>
-        </p:nvSpPr>
-        <p:spPr/>
-        <p:txBody>
-          <a:bodyPr/>
-          <a:lstStyle/>
-          <a:p>
-            <a:r>
-              <a:rPr sz="1300" b="1"/>
-              <a:t>Basic Models</a:t>
-            </a:r>
-          </a:p>
-        </p:txBody>
-      </p:sp>
-      <p:sp>
-        <p:nvSpPr>
-          <p:cNvPr id="7" name="Text Placeholder 6"/>
-          <p:cNvSpPr>
-            <a:spLocks noGrp="1"/>
-          </p:cNvSpPr>
-          <p:nvPr>
-            <p:ph type="body" idx="11" sz="quarter"/>
-          </p:nvPr>
-        </p:nvSpPr>
-        <p:spPr/>
-        <p:txBody>
-          <a:bodyPr/>
-          <a:lstStyle/>
-          <a:p>
-            <a:r>
-              <a:rPr sz="2800" b="1"/>
-              <a:t>Three Kinds of AI Models We Tested</a:t>
-            </a:r>
-          </a:p>
-        </p:txBody>
-      </p:sp>
-      <p:sp>
-        <p:nvSpPr>
-          <p:cNvPr id="8" name="Text Placeholder 7"/>
-          <p:cNvSpPr>
-            <a:spLocks noGrp="1"/>
-          </p:cNvSpPr>
-          <p:nvPr>
-            <p:ph type="body" idx="23" sz="quarter"/>
-          </p:nvPr>
-        </p:nvSpPr>
-        <p:spPr/>
-        <p:txBody>
-          <a:bodyPr/>
-          <a:lstStyle/>
-          <a:p>
-            <a:r>
-              <a:rPr sz="1300" b="1"/>
-              <a:t>Reasoning Models</a:t>
-            </a:r>
-          </a:p>
-        </p:txBody>
-      </p:sp>
-      <p:sp>
-        <p:nvSpPr>
-          <p:cNvPr id="9" name="Text Placeholder 8"/>
-          <p:cNvSpPr>
-            <a:spLocks noGrp="1"/>
-          </p:cNvSpPr>
-          <p:nvPr>
-            <p:ph type="body" idx="24" sz="quarter"/>
-          </p:nvPr>
-        </p:nvSpPr>
-        <p:spPr/>
-        <p:txBody>
-          <a:bodyPr/>
-          <a:lstStyle/>
-          <a:p>
-            <a:r>
-              <a:rPr sz="1300" b="1"/>
-              <a:t>Code-Specialized</a:t>
-            </a:r>
-          </a:p>
         </p:txBody>
       </p:sp>
     </p:spTree>
@@ -10891,131 +10508,63 @@
           <a:p>
             <a:pPr>
               <a:spcAft>
-                <a:spcPts val="400"/>
+                <a:spcPts val="800"/>
               </a:spcAft>
             </a:pPr>
             <a:r>
-              <a:rPr sz="1300" b="1">
-                <a:solidFill>
-                  <a:srgbClr val="FFFFFF"/>
-                </a:solidFill>
-              </a:rPr>
-              <a:t>Best syntactic correctness (SANY): </a:t>
-            </a:r>
-            <a:r>
-              <a:rPr sz="1300">
-                <a:solidFill>
-                  <a:srgbClr val="FFFFFF"/>
-                </a:solidFill>
-              </a:rPr>
-              <a:t>26.6% -- only 1 in 4 outputs is even valid TLA+</a:t>
+              <a:rPr sz="1500"/>
+              <a:t>A program that has read billions of pages of text and learned to predict the next word well enough that it sounds like a knowledgeable person wrote it.</a:t>
             </a:r>
           </a:p>
           <a:p>
             <a:pPr>
               <a:spcAft>
-                <a:spcPts val="400"/>
+                <a:spcPts val="800"/>
               </a:spcAft>
             </a:pPr>
             <a:r>
-              <a:rPr sz="1300" b="1">
-                <a:solidFill>
-                  <a:srgbClr val="FFFFFF"/>
-                </a:solidFill>
-              </a:rPr>
-              <a:t>Best semantic correctness (TLC): </a:t>
-            </a:r>
-            <a:r>
-              <a:rPr sz="1300">
-                <a:solidFill>
-                  <a:srgbClr val="FFFFFF"/>
-                </a:solidFill>
-              </a:rPr>
-              <a:t>8.6% -- fewer than 1 in 10 actually pass the model checker</a:t>
+              <a:rPr sz="1500"/>
+              <a:t>Good at English, Python, legal briefs, medical exams — the obvious stuff.</a:t>
             </a:r>
           </a:p>
           <a:p>
             <a:pPr>
               <a:spcAft>
-                <a:spcPts val="400"/>
+                <a:spcPts val="800"/>
               </a:spcAft>
             </a:pPr>
             <a:r>
-              <a:rPr sz="1300">
-                <a:solidFill>
-                  <a:srgbClr val="FFFFFF"/>
-                </a:solidFill>
-              </a:rPr>
-              <a:t/>
+              <a:rPr sz="1500"/>
+              <a:t>The natural question:  can it also write TLA+ proofs from a plain-English description?</a:t>
             </a:r>
           </a:p>
           <a:p>
             <a:pPr>
               <a:spcAft>
-                <a:spcPts val="400"/>
+                <a:spcPts val="800"/>
               </a:spcAft>
             </a:pPr>
             <a:r>
-              <a:rPr sz="1300" b="1">
-                <a:solidFill>
-                  <a:srgbClr val="FFFFFF"/>
-                </a:solidFill>
-              </a:rPr>
-              <a:t>Surprising finding #1: </a:t>
-            </a:r>
-            <a:r>
-              <a:rPr sz="1300">
-                <a:solidFill>
-                  <a:srgbClr val="FFFFFF"/>
-                </a:solidFill>
-              </a:rPr>
-              <a:t>Model size does not predict quality. DeepSeek R1 at 8 billion parameters outperformed its 70 billion parameter variant across every prompting strategy.</a:t>
+              <a:rPr sz="1500"/>
+              <a:t>We ran the experiment on thirty different models, using 205 expert-written proofs as our test.</a:t>
             </a:r>
           </a:p>
           <a:p>
             <a:pPr>
               <a:spcAft>
-                <a:spcPts val="400"/>
+                <a:spcPts val="800"/>
               </a:spcAft>
             </a:pPr>
-            <a:r>
-              <a:rPr sz="1300" b="1">
-                <a:solidFill>
-                  <a:srgbClr val="FFFFFF"/>
-                </a:solidFill>
-              </a:rPr>
-              <a:t>Surprising finding #2: </a:t>
-            </a:r>
-            <a:r>
-              <a:rPr sz="1300">
-                <a:solidFill>
-                  <a:srgbClr val="FFFFFF"/>
-                </a:solidFill>
-              </a:rPr>
-              <a:t>Code-specialized training hurts. Models trained on Python and JavaScript consistently performed worse than general-purpose models.</a:t>
-            </a:r>
           </a:p>
           <a:p>
             <a:pPr>
               <a:spcAft>
-                <a:spcPts val="400"/>
+                <a:spcPts val="800"/>
               </a:spcAft>
             </a:pPr>
             <a:r>
-              <a:rPr sz="1300" b="1">
-                <a:solidFill>
-                  <a:srgbClr val="FFFFFF"/>
-                </a:solidFill>
-              </a:rPr>
-              <a:t>Surprising finding #3: </a:t>
-            </a:r>
-            <a:r>
-              <a:rPr sz="1300">
-                <a:solidFill>
-                  <a:srgbClr val="FFFFFF"/>
-                </a:solidFill>
-              </a:rPr>
-              <a:t>Semantic success requires progressive prompting. Building specs piece-by-piece (Init, then Next, then Invariant) was the ONLY strategy that produced correct output. Direct and few-shot prompting never worked.</a:t>
+              <a:rPr sz="1500"/>
+              <a:t>The off-the-shelf best score:  8.6 percent.  Fewer than one in ten proofs was correct.  Prompting alone is not enough.  The model itself has to be taught.</a:t>
             </a:r>
           </a:p>
         </p:txBody>
@@ -11027,7 +10576,51 @@
             <a:spLocks noGrp="1"/>
           </p:cNvSpPr>
           <p:nvPr>
-            <p:ph type="body" idx="16" sz="quarter"/>
+            <p:ph type="body" idx="12" sz="quarter"/>
+          </p:nvPr>
+        </p:nvSpPr>
+        <p:spPr/>
+        <p:txBody>
+          <a:bodyPr/>
+          <a:lstStyle/>
+          <a:p>
+            <a:r>
+              <a:rPr sz="1400"/>
+              <a:t>You have already met one.  ChatGPT is a language model.</a:t>
+            </a:r>
+          </a:p>
+        </p:txBody>
+      </p:sp>
+      <p:sp>
+        <p:nvSpPr>
+          <p:cNvPr id="4" name="Text Placeholder 3"/>
+          <p:cNvSpPr>
+            <a:spLocks noGrp="1"/>
+          </p:cNvSpPr>
+          <p:nvPr>
+            <p:ph type="body" idx="11" sz="quarter"/>
+          </p:nvPr>
+        </p:nvSpPr>
+        <p:spPr/>
+        <p:txBody>
+          <a:bodyPr/>
+          <a:lstStyle/>
+          <a:p>
+            <a:r>
+              <a:rPr sz="2800" b="1"/>
+              <a:t>What a Language Model Is</a:t>
+            </a:r>
+          </a:p>
+        </p:txBody>
+      </p:sp>
+      <p:sp>
+        <p:nvSpPr>
+          <p:cNvPr id="5" name="Text Placeholder 4"/>
+          <p:cNvSpPr>
+            <a:spLocks noGrp="1"/>
+          </p:cNvSpPr>
+          <p:nvPr>
+            <p:ph type="body" idx="17" sz="quarter"/>
           </p:nvPr>
         </p:nvSpPr>
         <p:spPr/>
@@ -11035,50 +10628,6 @@
           <a:bodyPr/>
           <a:lstStyle/>
           <a:p/>
-        </p:txBody>
-      </p:sp>
-      <p:sp>
-        <p:nvSpPr>
-          <p:cNvPr id="4" name="Text Placeholder 3"/>
-          <p:cNvSpPr>
-            <a:spLocks noGrp="1"/>
-          </p:cNvSpPr>
-          <p:nvPr>
-            <p:ph type="body" idx="22" sz="quarter"/>
-          </p:nvPr>
-        </p:nvSpPr>
-        <p:spPr/>
-        <p:txBody>
-          <a:bodyPr/>
-          <a:lstStyle/>
-          <a:p>
-            <a:r>
-              <a:rPr sz="1200"/>
-              <a:t>30 models  |  8 families  |  205 specifications  |  2,730 evaluation runs</a:t>
-            </a:r>
-          </a:p>
-        </p:txBody>
-      </p:sp>
-      <p:sp>
-        <p:nvSpPr>
-          <p:cNvPr id="5" name="Text Placeholder 4"/>
-          <p:cNvSpPr>
-            <a:spLocks noGrp="1"/>
-          </p:cNvSpPr>
-          <p:nvPr>
-            <p:ph type="body" idx="11" sz="quarter"/>
-          </p:nvPr>
-        </p:nvSpPr>
-        <p:spPr/>
-        <p:txBody>
-          <a:bodyPr/>
-          <a:lstStyle/>
-          <a:p>
-            <a:r>
-              <a:rPr sz="2800" b="1"/>
-              <a:t>What We Found</a:t>
-            </a:r>
-          </a:p>
         </p:txBody>
       </p:sp>
     </p:spTree>
@@ -11116,61 +10665,63 @@
           <a:p>
             <a:pPr>
               <a:spcAft>
-                <a:spcPts val="400"/>
+                <a:spcPts val="800"/>
               </a:spcAft>
             </a:pPr>
             <a:r>
-              <a:rPr sz="1100" b="1"/>
-              <a:t>1. Curate training data: </a:t>
-            </a:r>
-            <a:r>
-              <a:rPr sz="1100"/>
-              <a:t>start with 205 expert-verified TLA+ specs, then scrape and validate more from GitHub. Every spec must pass both SANY and TLC.</a:t>
+              <a:rPr sz="1500"/>
+              <a:t>We started with a 20-billion-parameter open-source model that anyone can download.</a:t>
             </a:r>
           </a:p>
           <a:p>
             <a:pPr>
               <a:spcAft>
-                <a:spcPts val="400"/>
+                <a:spcPts val="800"/>
               </a:spcAft>
             </a:pPr>
             <a:r>
-              <a:rPr sz="1100" b="1"/>
-              <a:t>2. Fine-tune with LoRA: </a:t>
-            </a:r>
-            <a:r>
-              <a:rPr sz="1100"/>
-              <a:t>take an existing 20-billion-parameter model and train a small set of extra parameters on top. This is fast and efficient compared to training from scratch.</a:t>
+              <a:rPr sz="1500"/>
+              <a:t>Training loop:  the model writes a proof.  The checker decides correct or not.  Correct proofs become new training data.  The model retrains on its own successes.</a:t>
             </a:r>
           </a:p>
           <a:p>
             <a:pPr>
               <a:spcAft>
-                <a:spcPts val="400"/>
+                <a:spcPts val="800"/>
               </a:spcAft>
             </a:pPr>
             <a:r>
-              <a:rPr sz="1100" b="1"/>
-              <a:t>3. Model checker as training signal: </a:t>
-            </a:r>
-            <a:r>
-              <a:rPr sz="1100"/>
-              <a:t>traditional AI training asks "does the output look right?" -- we ask "does TLC say it has zero violations?" This is a perfect, automatic grading signal.</a:t>
+              <a:rPr sz="1500"/>
+              <a:t>This is self-improvement.  Because a mathematical program does the grading, no human is in the loop.  It can run unattended, all night, every night.</a:t>
             </a:r>
           </a:p>
           <a:p>
             <a:pPr>
               <a:spcAft>
-                <a:spcPts val="400"/>
+                <a:spcPts val="800"/>
               </a:spcAft>
             </a:pPr>
-            <a:r>
-              <a:rPr sz="1100" b="1"/>
-              <a:t>4. Self-improvement loop: </a:t>
-            </a:r>
-            <a:r>
-              <a:rPr sz="1100"/>
-              <a:t>the model generates new specs, TLC validates them, correct specs become new training data. The model retrains on its own successes, continuously improving.</a:t>
+          </a:p>
+          <a:p>
+            <a:pPr>
+              <a:spcAft>
+                <a:spcPts val="800"/>
+              </a:spcAft>
+            </a:pPr>
+            <a:r>
+              <a:rPr sz="1500"/>
+              <a:t>The promise:  a model that keeps getting better forever.</a:t>
+            </a:r>
+          </a:p>
+          <a:p>
+            <a:pPr>
+              <a:spcAft>
+                <a:spcPts val="800"/>
+              </a:spcAft>
+            </a:pPr>
+            <a:r>
+              <a:rPr sz="1500"/>
+              <a:t>The reality:  something went wrong — and the lesson turned out to be the most important finding in the work.</a:t>
             </a:r>
           </a:p>
         </p:txBody>
@@ -11182,7 +10733,7 @@
             <a:spLocks noGrp="1"/>
           </p:cNvSpPr>
           <p:nvPr>
-            <p:ph type="body" idx="15" sz="quarter"/>
+            <p:ph type="body" idx="12" sz="quarter"/>
           </p:nvPr>
         </p:nvSpPr>
         <p:spPr/>
@@ -11190,89 +10741,9 @@
           <a:bodyPr/>
           <a:lstStyle/>
           <a:p>
-            <a:pPr>
-              <a:spcAft>
-                <a:spcPts val="400"/>
-              </a:spcAft>
-            </a:pPr>
-            <a:r>
-              <a:rPr sz="1100" b="1"/>
-              <a:t>Perfect grading: </a:t>
-            </a:r>
-            <a:r>
-              <a:rPr sz="1100"/>
-              <a:t>unlike most AI tasks where "correct" is subjective, TLC provides a binary, reliable answer -- pass or fail</a:t>
-            </a:r>
-          </a:p>
-          <a:p>
-            <a:pPr>
-              <a:spcAft>
-                <a:spcPts val="400"/>
-              </a:spcAft>
-            </a:pPr>
-            <a:r>
-              <a:rPr sz="1100" b="1"/>
-              <a:t>Growing dataset: </a:t>
-            </a:r>
-            <a:r>
-              <a:rPr sz="1100"/>
-              <a:t>each training cycle produces new correct specs that feed the next cycle. The training set grows automatically.</a:t>
-            </a:r>
-          </a:p>
-          <a:p>
-            <a:pPr>
-              <a:spcAft>
-                <a:spcPts val="400"/>
-              </a:spcAft>
-            </a:pPr>
-            <a:r>
-              <a:rPr sz="1100" b="1"/>
-              <a:t>Targeted expertise: </a:t>
-            </a:r>
-            <a:r>
-              <a:rPr sz="1100"/>
-              <a:t>fine-tuning on TLA+ specifically addresses the negative transfer problem we observed in code-specialized models</a:t>
-            </a:r>
-          </a:p>
-          <a:p>
-            <a:pPr>
-              <a:spcAft>
-                <a:spcPts val="400"/>
-              </a:spcAft>
-            </a:pPr>
-            <a:r>
-              <a:rPr sz="1100" b="1"/>
-              <a:t>Accessible hardware: </a:t>
-            </a:r>
-            <a:r>
-              <a:rPr sz="1100"/>
-              <a:t>runs continuously on two GPUs (96 GB total VRAM) -- no supercomputer required</a:t>
-            </a:r>
-          </a:p>
-          <a:p>
-            <a:pPr>
-              <a:spcAft>
-                <a:spcPts val="400"/>
-              </a:spcAft>
-            </a:pPr>
-            <a:r>
-              <a:rPr sz="1100"/>
-              <a:t/>
-            </a:r>
-          </a:p>
-          <a:p>
-            <a:pPr>
-              <a:spcAft>
-                <a:spcPts val="400"/>
-              </a:spcAft>
-            </a:pPr>
-            <a:r>
-              <a:rPr sz="1100" b="1"/>
-              <a:t>Goal: </a:t>
-            </a:r>
-            <a:r>
-              <a:rPr sz="1100"/>
-              <a:t>make formal verification accessible to engineers who understand their systems but lack TLA+ expertise</a:t>
+            <a:r>
+              <a:rPr sz="1400"/>
+              <a:t>Take an existing model.  Keep training it on TLA+ specifically.</a:t>
             </a:r>
           </a:p>
         </p:txBody>
@@ -11280,6 +10751,28 @@
       <p:sp>
         <p:nvSpPr>
           <p:cNvPr id="4" name="Text Placeholder 3"/>
+          <p:cNvSpPr>
+            <a:spLocks noGrp="1"/>
+          </p:cNvSpPr>
+          <p:nvPr>
+            <p:ph type="body" idx="11" sz="quarter"/>
+          </p:nvPr>
+        </p:nvSpPr>
+        <p:spPr/>
+        <p:txBody>
+          <a:bodyPr/>
+          <a:lstStyle/>
+          <a:p>
+            <a:r>
+              <a:rPr sz="2800" b="1"/>
+              <a:t>Our Attempt:  Fine-Tuning</a:t>
+            </a:r>
+          </a:p>
+        </p:txBody>
+      </p:sp>
+      <p:sp>
+        <p:nvSpPr>
+          <p:cNvPr id="5" name="Text Placeholder 4"/>
           <p:cNvSpPr>
             <a:spLocks noGrp="1"/>
           </p:cNvSpPr>
@@ -11292,72 +10785,6 @@
           <a:bodyPr/>
           <a:lstStyle/>
           <a:p/>
-        </p:txBody>
-      </p:sp>
-      <p:sp>
-        <p:nvSpPr>
-          <p:cNvPr id="5" name="Text Placeholder 4"/>
-          <p:cNvSpPr>
-            <a:spLocks noGrp="1"/>
-          </p:cNvSpPr>
-          <p:nvPr>
-            <p:ph type="body" idx="18" sz="quarter"/>
-          </p:nvPr>
-        </p:nvSpPr>
-        <p:spPr/>
-        <p:txBody>
-          <a:bodyPr/>
-          <a:lstStyle/>
-          <a:p>
-            <a:r>
-              <a:rPr sz="1400" b="1"/>
-              <a:t>Our Approach</a:t>
-            </a:r>
-          </a:p>
-        </p:txBody>
-      </p:sp>
-      <p:sp>
-        <p:nvSpPr>
-          <p:cNvPr id="6" name="Text Placeholder 5"/>
-          <p:cNvSpPr>
-            <a:spLocks noGrp="1"/>
-          </p:cNvSpPr>
-          <p:nvPr>
-            <p:ph type="body" idx="11" sz="quarter"/>
-          </p:nvPr>
-        </p:nvSpPr>
-        <p:spPr/>
-        <p:txBody>
-          <a:bodyPr/>
-          <a:lstStyle/>
-          <a:p>
-            <a:r>
-              <a:rPr sz="2800" b="1"/>
-              <a:t>Building a Better Model: ChatTLA</a:t>
-            </a:r>
-          </a:p>
-        </p:txBody>
-      </p:sp>
-      <p:sp>
-        <p:nvSpPr>
-          <p:cNvPr id="7" name="Text Placeholder 6"/>
-          <p:cNvSpPr>
-            <a:spLocks noGrp="1"/>
-          </p:cNvSpPr>
-          <p:nvPr>
-            <p:ph type="body" idx="19" sz="quarter"/>
-          </p:nvPr>
-        </p:nvSpPr>
-        <p:spPr/>
-        <p:txBody>
-          <a:bodyPr/>
-          <a:lstStyle/>
-          <a:p>
-            <a:r>
-              <a:rPr sz="1400" b="1"/>
-              <a:t>Why This Should Work</a:t>
-            </a:r>
-          </a:p>
         </p:txBody>
       </p:sp>
     </p:spTree>
@@ -11385,7 +10812,7 @@
             <a:spLocks noGrp="1"/>
           </p:cNvSpPr>
           <p:nvPr>
-            <p:ph type="body" idx="12" sz="quarter"/>
+            <p:ph type="body" idx="10" sz="quarter"/>
           </p:nvPr>
         </p:nvSpPr>
         <p:spPr/>
@@ -11393,9 +10820,85 @@
           <a:bodyPr/>
           <a:lstStyle/>
           <a:p>
-            <a:r>
-              <a:rPr sz="1400"/>
-              <a:t>ai4fm.cs.luc.edu</a:t>
+            <a:pPr>
+              <a:spcAft>
+                <a:spcPts val="800"/>
+              </a:spcAft>
+            </a:pPr>
+            <a:r>
+              <a:rPr sz="1500">
+                <a:solidFill>
+                  <a:srgbClr val="FFFFFF"/>
+                </a:solidFill>
+              </a:rPr>
+              <a:t>The proof we wanted:  "the dice value is always between one and six."</a:t>
+            </a:r>
+          </a:p>
+          <a:p>
+            <a:pPr>
+              <a:spcAft>
+                <a:spcPts val="800"/>
+              </a:spcAft>
+            </a:pPr>
+            <a:r>
+              <a:rPr sz="1500">
+                <a:solidFill>
+                  <a:srgbClr val="FFFFFF"/>
+                </a:solidFill>
+              </a:rPr>
+              <a:t>The proof the model learned to produce:  "true is true" — an empty statement the checker accepts but that proves nothing.</a:t>
+            </a:r>
+          </a:p>
+          <a:p>
+            <a:pPr>
+              <a:spcAft>
+                <a:spcPts val="800"/>
+              </a:spcAft>
+            </a:pPr>
+            <a:r>
+              <a:rPr sz="1500">
+                <a:solidFill>
+                  <a:srgbClr val="FFFFFF"/>
+                </a:solidFill>
+              </a:rPr>
+              <a:t>Why it happens:  both pass the checker.  Writing nothing is the easiest way to score, so the model drifts that way over training.</a:t>
+            </a:r>
+          </a:p>
+          <a:p>
+            <a:pPr>
+              <a:spcAft>
+                <a:spcPts val="800"/>
+              </a:spcAft>
+            </a:pPr>
+            <a:r>
+              <a:rPr sz="1500">
+                <a:solidFill>
+                  <a:srgbClr val="FFFFFF"/>
+                </a:solidFill>
+              </a:rPr>
+              <a:t>In controlled tests, 97 percent of the AI's output converged on empty proofs.  Every random starting point.  Every time.</a:t>
+            </a:r>
+          </a:p>
+          <a:p>
+            <a:pPr>
+              <a:spcAft>
+                <a:spcPts val="800"/>
+              </a:spcAft>
+            </a:pPr>
+          </a:p>
+          <a:p>
+            <a:pPr>
+              <a:spcAft>
+                <a:spcPts val="800"/>
+              </a:spcAft>
+            </a:pPr>
+            <a:r>
+              <a:rPr sz="1500">
+                <a:solidFill>
+                  <a:srgbClr val="FFFFFF"/>
+                </a:solidFill>
+              </a:rPr>
+              <a:t>The honest-looking grade was a dishonest grade.</a:t>
             </a:r>
           </a:p>
         </p:txBody>
@@ -11407,19 +10910,399 @@
             <a:spLocks noGrp="1"/>
           </p:cNvSpPr>
           <p:nvPr>
-            <p:ph type="body" idx="11" sz="quarter"/>
+            <p:ph type="body" idx="16" sz="quarter"/>
           </p:nvPr>
         </p:nvSpPr>
         <p:spPr/>
         <p:txBody>
           <a:bodyPr/>
           <a:lstStyle/>
-          <a:p>
-            <a:r>
-              <a:rPr sz="3600" b="1"/>
-              <a:t>Thank You</a:t>
-            </a:r>
-          </a:p>
+          <a:p/>
+        </p:txBody>
+      </p:sp>
+      <p:sp>
+        <p:nvSpPr>
+          <p:cNvPr id="4" name="Text Placeholder 3"/>
+          <p:cNvSpPr>
+            <a:spLocks noGrp="1"/>
+          </p:cNvSpPr>
+          <p:nvPr>
+            <p:ph type="body" idx="22" sz="quarter"/>
+          </p:nvPr>
+        </p:nvSpPr>
+        <p:spPr/>
+        <p:txBody>
+          <a:bodyPr/>
+          <a:lstStyle/>
+          <a:p>
+            <a:r>
+              <a:rPr sz="1400"/>
+              <a:t>A failure mode we call the Vacuity Attractor.</a:t>
+            </a:r>
+          </a:p>
+        </p:txBody>
+      </p:sp>
+      <p:sp>
+        <p:nvSpPr>
+          <p:cNvPr id="5" name="Text Placeholder 4"/>
+          <p:cNvSpPr>
+            <a:spLocks noGrp="1"/>
+          </p:cNvSpPr>
+          <p:nvPr>
+            <p:ph type="body" idx="11" sz="quarter"/>
+          </p:nvPr>
+        </p:nvSpPr>
+        <p:spPr/>
+        <p:txBody>
+          <a:bodyPr/>
+          <a:lstStyle/>
+          <a:p>
+            <a:r>
+              <a:rPr sz="2800" b="1"/>
+              <a:t>The Discovery:  The AI Learned to Cheat</a:t>
+            </a:r>
+          </a:p>
+        </p:txBody>
+      </p:sp>
+    </p:spTree>
+  </p:cSld>
+  <p:clrMapOvr>
+    <a:masterClrMapping/>
+  </p:clrMapOvr>
+</p:sld>
+</file>
+
+<file path=ppt/slides/slide7.xml><?xml version="1.0" encoding="utf-8"?>
+<p:sld xmlns:a="http://schemas.openxmlformats.org/drawingml/2006/main" xmlns:p="http://schemas.openxmlformats.org/presentationml/2006/main" xmlns:r="http://schemas.openxmlformats.org/officeDocument/2006/relationships">
+  <p:cSld>
+    <p:spTree>
+      <p:nvGrpSpPr>
+        <p:cNvPr id="1" name=""/>
+        <p:cNvGrpSpPr/>
+        <p:nvPr/>
+      </p:nvGrpSpPr>
+      <p:grpSpPr/>
+      <p:sp>
+        <p:nvSpPr>
+          <p:cNvPr id="2" name="Text Placeholder 1"/>
+          <p:cNvSpPr>
+            <a:spLocks noGrp="1"/>
+          </p:cNvSpPr>
+          <p:nvPr>
+            <p:ph type="body" idx="10" sz="quarter"/>
+          </p:nvPr>
+        </p:nvSpPr>
+        <p:spPr/>
+        <p:txBody>
+          <a:bodyPr/>
+          <a:lstStyle/>
+          <a:p>
+            <a:pPr>
+              <a:spcAft>
+                <a:spcPts val="800"/>
+              </a:spcAft>
+            </a:pPr>
+            <a:r>
+              <a:rPr sz="1500">
+                <a:solidFill>
+                  <a:srgbClr val="FFFFFF"/>
+                </a:solidFill>
+              </a:rPr>
+              <a:t>A real proof catches deliberate sabotage.  An empty proof does not.  We call this the Diamond reward.</a:t>
+            </a:r>
+          </a:p>
+          <a:p>
+            <a:pPr>
+              <a:spcAft>
+                <a:spcPts val="800"/>
+              </a:spcAft>
+            </a:pPr>
+            <a:r>
+              <a:rPr sz="1500">
+                <a:solidFill>
+                  <a:srgbClr val="FFFFFF"/>
+                </a:solidFill>
+              </a:rPr>
+              <a:t>Result:  success on a held-out benchmark more than doubled — from 4 out of 30 up to 9 out of 30.</a:t>
+            </a:r>
+          </a:p>
+          <a:p>
+            <a:pPr>
+              <a:spcAft>
+                <a:spcPts val="800"/>
+              </a:spcAft>
+            </a:pPr>
+          </a:p>
+          <a:p>
+            <a:pPr>
+              <a:spcAft>
+                <a:spcPts val="800"/>
+              </a:spcAft>
+            </a:pPr>
+            <a:r>
+              <a:rPr sz="1500">
+                <a:solidFill>
+                  <a:srgbClr val="FFFFFF"/>
+                </a:solidFill>
+              </a:rPr>
+              <a:t>All of this ran on one workstation with two NVIDIA graphics cards.  Combined power draw about 600 watts — roughly a hair dryer.</a:t>
+            </a:r>
+          </a:p>
+          <a:p>
+            <a:pPr>
+              <a:spcAft>
+                <a:spcPts val="800"/>
+              </a:spcAft>
+            </a:pPr>
+            <a:r>
+              <a:rPr sz="1500">
+                <a:solidFill>
+                  <a:srgbClr val="FFFFFF"/>
+                </a:solidFill>
+              </a:rPr>
+              <a:t>For context:  training the original ChatGPT cost tens of millions of dollars in electricity.  Our whole project used less power than a household does in a year.</a:t>
+            </a:r>
+          </a:p>
+          <a:p>
+            <a:pPr>
+              <a:spcAft>
+                <a:spcPts val="800"/>
+              </a:spcAft>
+            </a:pPr>
+            <a:r>
+              <a:rPr sz="1500">
+                <a:solidFill>
+                  <a:srgbClr val="FFFFFF"/>
+                </a:solidFill>
+              </a:rPr>
+              <a:t>One graduate student, one desk, one year.</a:t>
+            </a:r>
+          </a:p>
+        </p:txBody>
+      </p:sp>
+      <p:sp>
+        <p:nvSpPr>
+          <p:cNvPr id="3" name="Text Placeholder 2"/>
+          <p:cNvSpPr>
+            <a:spLocks noGrp="1"/>
+          </p:cNvSpPr>
+          <p:nvPr>
+            <p:ph type="body" idx="16" sz="quarter"/>
+          </p:nvPr>
+        </p:nvSpPr>
+        <p:spPr/>
+        <p:txBody>
+          <a:bodyPr/>
+          <a:lstStyle/>
+          <a:p/>
+        </p:txBody>
+      </p:sp>
+      <p:sp>
+        <p:nvSpPr>
+          <p:cNvPr id="4" name="Text Placeholder 3"/>
+          <p:cNvSpPr>
+            <a:spLocks noGrp="1"/>
+          </p:cNvSpPr>
+          <p:nvPr>
+            <p:ph type="body" idx="22" sz="quarter"/>
+          </p:nvPr>
+        </p:nvSpPr>
+        <p:spPr/>
+        <p:txBody>
+          <a:bodyPr/>
+          <a:lstStyle/>
+          <a:p>
+            <a:r>
+              <a:rPr sz="1400"/>
+              <a:t>Break the program and ask whether the proof notices.</a:t>
+            </a:r>
+          </a:p>
+        </p:txBody>
+      </p:sp>
+      <p:sp>
+        <p:nvSpPr>
+          <p:cNvPr id="5" name="Text Placeholder 4"/>
+          <p:cNvSpPr>
+            <a:spLocks noGrp="1"/>
+          </p:cNvSpPr>
+          <p:nvPr>
+            <p:ph type="body" idx="11" sz="quarter"/>
+          </p:nvPr>
+        </p:nvSpPr>
+        <p:spPr/>
+        <p:txBody>
+          <a:bodyPr/>
+          <a:lstStyle/>
+          <a:p>
+            <a:r>
+              <a:rPr sz="2800" b="1"/>
+              <a:t>The Fix:  Grade It Honestly</a:t>
+            </a:r>
+          </a:p>
+        </p:txBody>
+      </p:sp>
+    </p:spTree>
+  </p:cSld>
+  <p:clrMapOvr>
+    <a:masterClrMapping/>
+  </p:clrMapOvr>
+</p:sld>
+</file>
+
+<file path=ppt/slides/slide8.xml><?xml version="1.0" encoding="utf-8"?>
+<p:sld xmlns:a="http://schemas.openxmlformats.org/drawingml/2006/main" xmlns:p="http://schemas.openxmlformats.org/presentationml/2006/main" xmlns:r="http://schemas.openxmlformats.org/officeDocument/2006/relationships">
+  <p:cSld>
+    <p:spTree>
+      <p:nvGrpSpPr>
+        <p:cNvPr id="1" name=""/>
+        <p:cNvGrpSpPr/>
+        <p:nvPr/>
+      </p:nvGrpSpPr>
+      <p:grpSpPr/>
+      <p:sp>
+        <p:nvSpPr>
+          <p:cNvPr id="2" name="Text Placeholder 1"/>
+          <p:cNvSpPr>
+            <a:spLocks noGrp="1"/>
+          </p:cNvSpPr>
+          <p:nvPr>
+            <p:ph type="body" idx="10" sz="quarter"/>
+          </p:nvPr>
+        </p:nvSpPr>
+        <p:spPr/>
+        <p:txBody>
+          <a:bodyPr/>
+          <a:lstStyle/>
+          <a:p>
+            <a:pPr>
+              <a:spcAft>
+                <a:spcPts val="800"/>
+              </a:spcAft>
+            </a:pPr>
+            <a:r>
+              <a:rPr sz="1500"/>
+              <a:t>Cloud and finance:  banks, payment networks, and cloud providers lose millions to bugs that a proof would have caught.</a:t>
+            </a:r>
+          </a:p>
+          <a:p>
+            <a:pPr>
+              <a:spcAft>
+                <a:spcPts val="800"/>
+              </a:spcAft>
+            </a:pPr>
+            <a:r>
+              <a:rPr sz="1500"/>
+              <a:t>Safety-critical devices:  aviation, medical, self-driving, industrial control — all regulated because bugs can kill.</a:t>
+            </a:r>
+          </a:p>
+          <a:p>
+            <a:pPr>
+              <a:spcAft>
+                <a:spcPts val="800"/>
+              </a:spcAft>
+            </a:pPr>
+            <a:r>
+              <a:rPr sz="1500"/>
+              <a:t>Blockchain and protocols:  smart contracts have lost users billions to bugs formal verification could have prevented.</a:t>
+            </a:r>
+          </a:p>
+          <a:p>
+            <a:pPr>
+              <a:spcAft>
+                <a:spcPts val="800"/>
+              </a:spcAft>
+            </a:pPr>
+          </a:p>
+          <a:p>
+            <a:pPr>
+              <a:spcAft>
+                <a:spcPts val="800"/>
+              </a:spcAft>
+            </a:pPr>
+            <a:r>
+              <a:rPr sz="1500"/>
+              <a:t>The techniques here extend beyond TLA+ to related proof languages.  The same reward idea — grade honestly, not just bindingly — generalizes.</a:t>
+            </a:r>
+          </a:p>
+          <a:p>
+            <a:pPr>
+              <a:spcAft>
+                <a:spcPts val="800"/>
+              </a:spcAft>
+            </a:pPr>
+          </a:p>
+          <a:p>
+            <a:pPr>
+              <a:spcAft>
+                <a:spcPts val="800"/>
+              </a:spcAft>
+            </a:pPr>
+            <a:r>
+              <a:rPr sz="1500"/>
+              <a:t>Thank you.   ai4fm.cs.luc.edu</a:t>
+            </a:r>
+          </a:p>
+        </p:txBody>
+      </p:sp>
+      <p:sp>
+        <p:nvSpPr>
+          <p:cNvPr id="3" name="Text Placeholder 2"/>
+          <p:cNvSpPr>
+            <a:spLocks noGrp="1"/>
+          </p:cNvSpPr>
+          <p:nvPr>
+            <p:ph type="body" idx="12" sz="quarter"/>
+          </p:nvPr>
+        </p:nvSpPr>
+        <p:spPr/>
+        <p:txBody>
+          <a:bodyPr/>
+          <a:lstStyle/>
+          <a:p>
+            <a:r>
+              <a:rPr sz="1400"/>
+              <a:t>Every domain where a software bug is unacceptable.</a:t>
+            </a:r>
+          </a:p>
+        </p:txBody>
+      </p:sp>
+      <p:sp>
+        <p:nvSpPr>
+          <p:cNvPr id="4" name="Text Placeholder 3"/>
+          <p:cNvSpPr>
+            <a:spLocks noGrp="1"/>
+          </p:cNvSpPr>
+          <p:nvPr>
+            <p:ph type="body" idx="11" sz="quarter"/>
+          </p:nvPr>
+        </p:nvSpPr>
+        <p:spPr/>
+        <p:txBody>
+          <a:bodyPr/>
+          <a:lstStyle/>
+          <a:p>
+            <a:r>
+              <a:rPr sz="2800" b="1"/>
+              <a:t>Where This Goes</a:t>
+            </a:r>
+          </a:p>
+        </p:txBody>
+      </p:sp>
+      <p:sp>
+        <p:nvSpPr>
+          <p:cNvPr id="5" name="Text Placeholder 4"/>
+          <p:cNvSpPr>
+            <a:spLocks noGrp="1"/>
+          </p:cNvSpPr>
+          <p:nvPr>
+            <p:ph type="body" idx="17" sz="quarter"/>
+          </p:nvPr>
+        </p:nvSpPr>
+        <p:spPr/>
+        <p:txBody>
+          <a:bodyPr/>
+          <a:lstStyle/>
+          <a:p/>
         </p:txBody>
       </p:sp>
     </p:spTree>
